--- a/out/recipes.pptx
+++ b/out/recipes.pptx
@@ -9772,12 +9772,12 @@
         </p:nvSpPr>
         <p:spPr>
           <a:xfrm>
-            <a:off x="2523401" y="2720340"/>
-            <a:ext cx="2286000" cy="2286000"/>
+            <a:off x="2491397" y="2688336"/>
+            <a:ext cx="2350008" cy="2350008"/>
           </a:xfrm>
           <a:prstGeom prst="donut">
             <a:avLst>
-              <a:gd name="adj" fmla="val 2799"/>
+              <a:gd name="adj" fmla="val 2723"/>
             </a:avLst>
           </a:prstGeom>
           <a:solidFill>
@@ -9818,7 +9818,7 @@
         </p:nvSpPr>
         <p:spPr>
           <a:xfrm rot="8100000">
-            <a:off x="4364896" y="2963676"/>
+            <a:off x="4386448" y="2985229"/>
             <a:ext cx="219456" cy="182880"/>
           </a:xfrm>
           <a:prstGeom prst="triangle">
@@ -9862,7 +9862,7 @@
         </p:nvSpPr>
         <p:spPr>
           <a:xfrm rot="13500000">
-            <a:off x="4364896" y="4580123"/>
+            <a:off x="4343343" y="4601675"/>
             <a:ext cx="219456" cy="182880"/>
           </a:xfrm>
           <a:prstGeom prst="triangle">
@@ -9906,7 +9906,7 @@
         </p:nvSpPr>
         <p:spPr>
           <a:xfrm rot="18900000">
-            <a:off x="2748450" y="4580123"/>
+            <a:off x="2726897" y="4558570"/>
             <a:ext cx="219456" cy="182880"/>
           </a:xfrm>
           <a:prstGeom prst="triangle">
@@ -9950,7 +9950,7 @@
         </p:nvSpPr>
         <p:spPr>
           <a:xfrm rot="2700000">
-            <a:off x="2748450" y="2963676"/>
+            <a:off x="2770002" y="2942124"/>
             <a:ext cx="219456" cy="182880"/>
           </a:xfrm>
           <a:prstGeom prst="triangle">

--- a/out/recipes.pptx
+++ b/out/recipes.pptx
@@ -9825,7 +9825,7 @@
             <a:avLst/>
           </a:prstGeom>
           <a:solidFill>
-            <a:srgbClr val="C9D1D9"/>
+            <a:srgbClr val="6C757D"/>
           </a:solidFill>
           <a:ln>
             <a:noFill/>
@@ -9869,7 +9869,7 @@
             <a:avLst/>
           </a:prstGeom>
           <a:solidFill>
-            <a:srgbClr val="C9D1D9"/>
+            <a:srgbClr val="6C757D"/>
           </a:solidFill>
           <a:ln>
             <a:noFill/>
@@ -9913,7 +9913,7 @@
             <a:avLst/>
           </a:prstGeom>
           <a:solidFill>
-            <a:srgbClr val="C9D1D9"/>
+            <a:srgbClr val="6C757D"/>
           </a:solidFill>
           <a:ln>
             <a:noFill/>
@@ -9957,7 +9957,7 @@
             <a:avLst/>
           </a:prstGeom>
           <a:solidFill>
-            <a:srgbClr val="C9D1D9"/>
+            <a:srgbClr val="6C757D"/>
           </a:solidFill>
           <a:ln>
             <a:noFill/>
